--- a/trames/trame_segoe.pptx
+++ b/trames/trame_segoe.pptx
@@ -132,7 +132,7 @@
   <pc:docChgLst>
     <pc:chgData name="François THIERY" userId="49d9e14f-09e0-4f81-ad6d-421fffe7070f" providerId="ADAL" clId="{1EAFC226-11D4-4628-84D5-D25FB09CCD2F}"/>
     <pc:docChg chg="undo redo custSel addSld delSld modSld modMainMaster">
-      <pc:chgData name="François THIERY" userId="49d9e14f-09e0-4f81-ad6d-421fffe7070f" providerId="ADAL" clId="{1EAFC226-11D4-4628-84D5-D25FB09CCD2F}" dt="2026-07-09T15:37:24.291" v="3836" actId="947"/>
+      <pc:chgData name="François THIERY" userId="49d9e14f-09e0-4f81-ad6d-421fffe7070f" providerId="ADAL" clId="{1EAFC226-11D4-4628-84D5-D25FB09CCD2F}" dt="2026-07-09T17:01:23.298" v="3838" actId="14100"/>
       <pc:docMkLst>
         <pc:docMk/>
       </pc:docMkLst>
@@ -395,7 +395,7 @@
         </pc:sldMkLst>
       </pc:sldChg>
       <pc:sldMasterChg chg="addSldLayout modSldLayout sldLayoutOrd">
-        <pc:chgData name="François THIERY" userId="49d9e14f-09e0-4f81-ad6d-421fffe7070f" providerId="ADAL" clId="{1EAFC226-11D4-4628-84D5-D25FB09CCD2F}" dt="2026-07-09T15:37:24.291" v="3836" actId="947"/>
+        <pc:chgData name="François THIERY" userId="49d9e14f-09e0-4f81-ad6d-421fffe7070f" providerId="ADAL" clId="{1EAFC226-11D4-4628-84D5-D25FB09CCD2F}" dt="2026-07-09T17:01:23.298" v="3838" actId="14100"/>
         <pc:sldMasterMkLst>
           <pc:docMk/>
           <pc:sldMasterMk cId="998767469" sldId="2147483672"/>
@@ -486,6 +486,23 @@
               <pc:sldMasterMk cId="998767469" sldId="2147483672"/>
               <pc:sldLayoutMk cId="647651248" sldId="2147483673"/>
               <ac:spMk id="31" creationId="{1A16A519-7EB8-18E0-F423-43829FD47B88}"/>
+            </ac:spMkLst>
+          </pc:spChg>
+        </pc:sldLayoutChg>
+        <pc:sldLayoutChg chg="modSp mod">
+          <pc:chgData name="François THIERY" userId="49d9e14f-09e0-4f81-ad6d-421fffe7070f" providerId="ADAL" clId="{1EAFC226-11D4-4628-84D5-D25FB09CCD2F}" dt="2026-07-09T17:01:23.298" v="3838" actId="14100"/>
+          <pc:sldLayoutMkLst>
+            <pc:docMk/>
+            <pc:sldMasterMk cId="998767469" sldId="2147483672"/>
+            <pc:sldLayoutMk cId="2553854360" sldId="2147483685"/>
+          </pc:sldLayoutMkLst>
+          <pc:spChg chg="mod">
+            <ac:chgData name="François THIERY" userId="49d9e14f-09e0-4f81-ad6d-421fffe7070f" providerId="ADAL" clId="{1EAFC226-11D4-4628-84D5-D25FB09CCD2F}" dt="2026-07-09T17:01:23.298" v="3838" actId="14100"/>
+            <ac:spMkLst>
+              <pc:docMk/>
+              <pc:sldMasterMk cId="998767469" sldId="2147483672"/>
+              <pc:sldLayoutMk cId="2553854360" sldId="2147483685"/>
+              <ac:spMk id="6" creationId="{1199785F-868A-EFB7-2816-EC18819373D0}"/>
             </ac:spMkLst>
           </pc:spChg>
         </pc:sldLayoutChg>
@@ -8215,7 +8232,7 @@
         <p:spPr>
           <a:xfrm>
             <a:off x="0" y="6369627"/>
-            <a:ext cx="10691813" cy="1190048"/>
+            <a:ext cx="10684800" cy="1180800"/>
           </a:xfrm>
           <a:prstGeom prst="rect">
             <a:avLst/>
